--- a/课程/课件/题集刷题导航/第7章-图/第7章-图.pptx
+++ b/课程/课件/题集刷题导航/第7章-图/第7章-图.pptx
@@ -2506,7 +2506,7 @@
                           <a:ea typeface="微软雅黑" panose="020B0503020204020204" pitchFamily="34" charset="-122"/>
                           <a:cs typeface="微软雅黑" panose="020B0503020204020204" pitchFamily="34" charset="-120"/>
                         </a:rPr>
-                        <a:t>46</a:t>
+                        <a:t>43</a:t>
                       </a:r>
                       <a:endParaRPr lang="en-US" sz="1500" dirty="0">
                         <a:latin typeface="微软雅黑" panose="020B0503020204020204" pitchFamily="34" charset="-122"/>
@@ -2574,7 +2574,7 @@
                           <a:ea typeface="微软雅黑" panose="020B0503020204020204" pitchFamily="34" charset="-122"/>
                           <a:cs typeface="微软雅黑" panose="020B0503020204020204" pitchFamily="34" charset="-120"/>
                         </a:rPr>
-                        <a:t>61%</a:t>
+                        <a:t>57%</a:t>
                       </a:r>
                       <a:endParaRPr lang="en-US" sz="1500" dirty="0">
                         <a:latin typeface="微软雅黑" panose="020B0503020204020204" pitchFamily="34" charset="-122"/>
@@ -2642,7 +2642,7 @@
                           <a:ea typeface="微软雅黑" panose="020B0503020204020204" pitchFamily="34" charset="-122"/>
                           <a:cs typeface="微软雅黑" panose="020B0503020204020204" pitchFamily="34" charset="-120"/>
                         </a:rPr>
-                        <a:t>在纲内、考频低，限时巩固</a:t>
+                        <a:t>低频巩固，时间充裕时选做</a:t>
                       </a:r>
                       <a:endParaRPr lang="en-US" sz="1500" dirty="0">
                         <a:latin typeface="微软雅黑" panose="020B0503020204020204" pitchFamily="34" charset="-122"/>
@@ -2780,7 +2780,7 @@
                           <a:ea typeface="微软雅黑" panose="020B0503020204020204" pitchFamily="34" charset="-122"/>
                           <a:cs typeface="微软雅黑" panose="020B0503020204020204" pitchFamily="34" charset="-120"/>
                         </a:rPr>
-                        <a:t>10</a:t>
+                        <a:t>13</a:t>
                       </a:r>
                       <a:endParaRPr lang="en-US" sz="1500" dirty="0">
                         <a:latin typeface="微软雅黑" panose="020B0503020204020204" pitchFamily="34" charset="-122"/>
@@ -2848,7 +2848,7 @@
                           <a:ea typeface="微软雅黑" panose="020B0503020204020204" pitchFamily="34" charset="-122"/>
                           <a:cs typeface="微软雅黑" panose="020B0503020204020204" pitchFamily="34" charset="-120"/>
                         </a:rPr>
-                        <a:t>13%</a:t>
+                        <a:t>17%</a:t>
                       </a:r>
                       <a:endParaRPr lang="en-US" sz="1500" dirty="0">
                         <a:latin typeface="微软雅黑" panose="020B0503020204020204" pitchFamily="34" charset="-122"/>
@@ -2916,7 +2916,7 @@
                           <a:ea typeface="微软雅黑" panose="020B0503020204020204" pitchFamily="34" charset="-122"/>
                           <a:cs typeface="微软雅黑" panose="020B0503020204020204" pitchFamily="34" charset="-120"/>
                         </a:rPr>
-                        <a:t>超纲或无对应题型，直接跳过</a:t>
+                        <a:t>超出复习范围，直接跳过</a:t>
                       </a:r>
                       <a:endParaRPr lang="en-US" sz="1500" dirty="0">
                         <a:latin typeface="微软雅黑" panose="020B0503020204020204" pitchFamily="34" charset="-122"/>
@@ -9203,7 +9203,7 @@
                           <a:ea typeface="微软雅黑" panose="020B0503020204020204" pitchFamily="34" charset="-122"/>
                           <a:cs typeface="微软雅黑" panose="020B0503020204020204" pitchFamily="34" charset="-120"/>
                         </a:rPr>
-                        <a:t>DFS编号体系</a:t>
+                        <a:t>DFS编号、强连通分量</a:t>
                       </a:r>
                       <a:endParaRPr lang="en-US" sz="1500" dirty="0">
                         <a:latin typeface="微软雅黑" panose="020B0503020204020204" pitchFamily="34" charset="-122"/>
@@ -9271,7 +9271,7 @@
                           <a:ea typeface="微软雅黑" panose="020B0503020204020204" pitchFamily="34" charset="-122"/>
                           <a:cs typeface="微软雅黑" panose="020B0503020204020204" pitchFamily="34" charset="-120"/>
                         </a:rPr>
-                        <a:t>算16</a:t>
+                        <a:t>算16、22</a:t>
                       </a:r>
                       <a:endParaRPr lang="en-US" sz="1500" dirty="0">
                         <a:latin typeface="微软雅黑" panose="020B0503020204020204" pitchFamily="34" charset="-122"/>
@@ -9341,7 +9341,7 @@
                           <a:ea typeface="微软雅黑" panose="020B0503020204020204" pitchFamily="34" charset="-122"/>
                           <a:cs typeface="微软雅黑" panose="020B0503020204020204" pitchFamily="34" charset="-120"/>
                         </a:rPr>
-                        <a:t>强连通分量算法</a:t>
+                        <a:t>生成树、最短路与关键路径代码</a:t>
                       </a:r>
                       <a:endParaRPr lang="en-US" sz="1500" dirty="0">
                         <a:latin typeface="微软雅黑" panose="020B0503020204020204" pitchFamily="34" charset="-122"/>
@@ -9409,7 +9409,7 @@
                           <a:ea typeface="微软雅黑" panose="020B0503020204020204" pitchFamily="34" charset="-122"/>
                           <a:cs typeface="微软雅黑" panose="020B0503020204020204" pitchFamily="34" charset="-120"/>
                         </a:rPr>
-                        <a:t>算22</a:t>
+                        <a:t>算23、32、33</a:t>
                       </a:r>
                       <a:endParaRPr lang="en-US" sz="1500" dirty="0">
                         <a:latin typeface="微软雅黑" panose="020B0503020204020204" pitchFamily="34" charset="-122"/>
@@ -10070,7 +10070,7 @@
                           <a:ea typeface="微软雅黑" panose="020B0503020204020204" pitchFamily="34" charset="-122"/>
                           <a:cs typeface="微软雅黑" panose="020B0503020204020204" pitchFamily="34" charset="-120"/>
                         </a:rPr>
-                        <a:t>算法设计题：图算法域内巩固（建图与基本操作、…</a:t>
+                        <a:t>算法题：建图与基本操作等</a:t>
                       </a:r>
                       <a:endParaRPr lang="en-US" sz="1500" dirty="0">
                         <a:latin typeface="微软雅黑" panose="020B0503020204020204" pitchFamily="34" charset="-122"/>
@@ -10138,7 +10138,7 @@
                           <a:ea typeface="微软雅黑" panose="020B0503020204020204" pitchFamily="34" charset="-122"/>
                           <a:cs typeface="微软雅黑" panose="020B0503020204020204" pitchFamily="34" charset="-120"/>
                         </a:rPr>
-                        <a:t>算1—3、7—12、15、20、21、23、24…</a:t>
+                        <a:t>算1—3、7—12、15、20、21、24</a:t>
                       </a:r>
                       <a:endParaRPr lang="en-US" sz="1500" dirty="0">
                         <a:latin typeface="微软雅黑" panose="020B0503020204020204" pitchFamily="34" charset="-122"/>
@@ -10276,7 +10276,7 @@
                           <a:ea typeface="微软雅黑" panose="020B0503020204020204" pitchFamily="34" charset="-122"/>
                           <a:cs typeface="微软雅黑" panose="020B0503020204020204" pitchFamily="34" charset="-120"/>
                         </a:rPr>
-                        <a:t>26—34</a:t>
+                        <a:t>26—31、34</a:t>
                       </a:r>
                       <a:endParaRPr lang="en-US" sz="1500" dirty="0">
                         <a:latin typeface="微软雅黑" panose="020B0503020204020204" pitchFamily="34" charset="-122"/>
@@ -10577,7 +10577,7 @@
                   <a:srgbClr val="000000"/>
                 </a:solidFill>
               </a:rPr>
-              <a:t>可做可不做46题：一轮复习时限时过，二轮只看错题</a:t>
+              <a:t>可做可不做43题：一轮限时过，二轮只看错题</a:t>
             </a:r>
             <a:endParaRPr lang="en-US" sz="1800" dirty="0"/>
           </a:p>
@@ -10626,7 +10626,7 @@
                   <a:srgbClr val="000000"/>
                 </a:solidFill>
               </a:rPr>
-              <a:t>完全不做10题：直接跳过</a:t>
+              <a:t>完全不做13题：直接跳过</a:t>
             </a:r>
             <a:endParaRPr lang="en-US" sz="1800" dirty="0"/>
           </a:p>
